--- a/courses/theory/slides/lec01-overview.pptx
+++ b/courses/theory/slides/lec01-overview.pptx
@@ -6211,22 +6211,6 @@
             <a:pPr lvl="1" eaLnBrk="1" hangingPunct="1"/>
             <a:r>
               <a:rPr lang="en-US" altLang="zh-CN" dirty="0"/>
-              <a:t>Monday, 14:00pm</a:t>
-            </a:r>
-            <a:r>
-              <a:rPr lang="zh-CN" altLang="en-US" dirty="0"/>
-              <a:t> </a:t>
-            </a:r>
-            <a:r>
-              <a:rPr lang="en-US" altLang="zh-CN" dirty="0"/>
-              <a:t>+</a:t>
-            </a:r>
-            <a:r>
-              <a:rPr lang="zh-CN" altLang="en-US" dirty="0"/>
-              <a:t> </a:t>
-            </a:r>
-            <a:r>
-              <a:rPr lang="en-US" altLang="zh-CN" dirty="0"/>
               <a:t>Tuesday,</a:t>
             </a:r>
             <a:r>
@@ -6234,9 +6218,10 @@
               <a:t> </a:t>
             </a:r>
             <a:r>
-              <a:rPr lang="en-US" altLang="zh-CN" dirty="0"/>
-              <a:t>8:40am</a:t>
-            </a:r>
+              <a:rPr lang="en-US" altLang="zh-CN"/>
+              <a:t>2:00pm</a:t>
+            </a:r>
+            <a:endParaRPr lang="en-US" altLang="zh-CN" dirty="0"/>
           </a:p>
           <a:p>
             <a:pPr lvl="1" eaLnBrk="1" hangingPunct="1"/>
